--- a/work_and_report/presentations/William_Rodriguez_Offers_NeueFische_Style_2.pptx
+++ b/work_and_report/presentations/William_Rodriguez_Offers_NeueFische_Style_2.pptx
@@ -1959,6 +1959,41 @@
           </a:p>
         </p:txBody>
       </p:sp>
+      <p:sp>
+        <p:nvSpPr>
+          <p:cNvPr id="4" name="TextBox 3"/>
+          <p:cNvSpPr txBox="1"/>
+          <p:nvPr/>
+        </p:nvSpPr>
+        <p:spPr>
+          <a:xfrm>
+            <a:off x="5715400" y="4640580"/>
+            <a:ext cx="3200000" cy="365760"/>
+          </a:xfrm>
+          <a:prstGeom prst="rect">
+            <a:avLst/>
+          </a:prstGeom>
+          <a:noFill/>
+        </p:spPr>
+        <p:txBody>
+          <a:bodyPr wrap="square">
+            <a:spAutoFit/>
+          </a:bodyPr>
+          <a:lstStyle/>
+          <a:p>
+            <a:pPr algn="r"/>
+            <a:r>
+              <a:rPr sz="1100" i="1">
+                <a:solidFill>
+                  <a:srgbClr val="FFFFFF"/>
+                </a:solidFill>
+                <a:latin typeface="Calibri"/>
+              </a:rPr>
+              <a:t>Done by Mohammad Bajbouj &amp; Tim Pfeifer</a:t>
+            </a:r>
+          </a:p>
+        </p:txBody>
+      </p:sp>
     </p:spTree>
   </p:cSld>
   <p:clrMapOvr>

--- a/work_and_report/presentations/William_Rodriguez_Offers_NeueFische_Style_2.pptx
+++ b/work_and_report/presentations/William_Rodriguez_Offers_NeueFische_Style_2.pptx
@@ -9161,7 +9161,7 @@
                 <a:ea typeface="Calibri" pitchFamily="34" charset="-122"/>
                 <a:cs typeface="Calibri" pitchFamily="34" charset="-120"/>
               </a:rPr>
-              <a:t>• $182.7K - $185K range</a:t>
+              <a:t>• $265K - $271K range</a:t>
             </a:r>
             <a:endParaRPr lang="en-US" sz="1000" dirty="0"/>
           </a:p>
@@ -11293,7 +11293,7 @@
                 <a:ea typeface="Calibri" pitchFamily="34" charset="-122"/>
                 <a:cs typeface="Calibri" pitchFamily="34" charset="-120"/>
               </a:rPr>
-              <a:t>• Rural houses only (3 zip codes)</a:t>
+              <a:t>• Rural = RUCA-classified (849 houses, 49 zips)</a:t>
             </a:r>
             <a:endParaRPr lang="en-US" sz="1100" dirty="0"/>
           </a:p>
@@ -11332,7 +11332,7 @@
                 <a:ea typeface="Calibri" pitchFamily="34" charset="-122"/>
                 <a:cs typeface="Calibri" pitchFamily="34" charset="-120"/>
               </a:rPr>
-              <a:t>• Effect direction varies by size</a:t>
+              <a:t>• Effect direction inconsistent by size</a:t>
             </a:r>
             <a:endParaRPr lang="en-US" sz="1100" dirty="0"/>
           </a:p>
@@ -11371,7 +11371,7 @@
                 <a:ea typeface="Calibri" pitchFamily="34" charset="-122"/>
                 <a:cs typeface="Calibri" pitchFamily="34" charset="-120"/>
               </a:rPr>
-              <a:t>• Medium homes: $8K cheaper (non-reno)</a:t>
+              <a:t>• Medium homes: $1.55K cheaper (non-reno)</a:t>
             </a:r>
             <a:endParaRPr lang="en-US" sz="1100" dirty="0"/>
           </a:p>
@@ -11410,7 +11410,7 @@
                 <a:ea typeface="Calibri" pitchFamily="34" charset="-122"/>
                 <a:cs typeface="Calibri" pitchFamily="34" charset="-120"/>
               </a:rPr>
-              <a:t>• Large homes: $21.75K cheaper (non-reno)</a:t>
+              <a:t>• Large homes: $12.5K pricier (non-reno)</a:t>
             </a:r>
             <a:endParaRPr lang="en-US" sz="1100" dirty="0"/>
           </a:p>
@@ -11449,7 +11449,7 @@
                 <a:ea typeface="Calibri" pitchFamily="34" charset="-122"/>
                 <a:cs typeface="Calibri" pitchFamily="34" charset="-120"/>
               </a:rPr>
-              <a:t>• Small homes: $2.5K pricier (non-reno)</a:t>
+              <a:t>• Small homes: $5.8K pricier (non-reno)</a:t>
             </a:r>
             <a:endParaRPr lang="en-US" sz="1100" dirty="0"/>
           </a:p>
@@ -11673,7 +11673,7 @@
                 <a:ea typeface="Calibri" pitchFamily="34" charset="-122"/>
                 <a:cs typeface="Calibri" pitchFamily="34" charset="-120"/>
               </a:rPr>
-              <a:t>539 houses</a:t>
+              <a:t>279 houses</a:t>
             </a:r>
             <a:endParaRPr lang="en-US" sz="1100" dirty="0"/>
           </a:p>
@@ -11751,7 +11751,7 @@
                 <a:ea typeface="Calibri" pitchFamily="34" charset="-122"/>
                 <a:cs typeface="Calibri" pitchFamily="34" charset="-120"/>
               </a:rPr>
-              <a:t>0.377</a:t>
+              <a:t>0.752</a:t>
             </a:r>
             <a:endParaRPr lang="en-US" sz="1100" dirty="0"/>
           </a:p>
@@ -11907,7 +11907,7 @@
                 <a:ea typeface="Calibri" pitchFamily="34" charset="-122"/>
                 <a:cs typeface="Calibri" pitchFamily="34" charset="-120"/>
               </a:rPr>
-              <a:t>$8,000</a:t>
+              <a:t>$1,550</a:t>
             </a:r>
             <a:endParaRPr lang="en-US" sz="1100" dirty="0"/>
           </a:p>
@@ -11946,7 +11946,7 @@
                 <a:ea typeface="Calibri" pitchFamily="34" charset="-122"/>
                 <a:cs typeface="Calibri" pitchFamily="34" charset="-120"/>
               </a:rPr>
-              <a:t>Rural Zips</a:t>
+              <a:t>Rural Def.</a:t>
             </a:r>
             <a:endParaRPr lang="en-US" sz="1100" dirty="0"/>
           </a:p>
@@ -11985,7 +11985,7 @@
                 <a:ea typeface="Calibri" pitchFamily="34" charset="-122"/>
                 <a:cs typeface="Calibri" pitchFamily="34" charset="-120"/>
               </a:rPr>
-              <a:t>98038/42/23</a:t>
+              <a:t>RUCA codes</a:t>
             </a:r>
             <a:endParaRPr lang="en-US" sz="1100" dirty="0"/>
           </a:p>
@@ -12275,7 +12275,7 @@
                 <a:ea typeface="Calibri" pitchFamily="34" charset="-122"/>
                 <a:cs typeface="Calibri" pitchFamily="34" charset="-120"/>
               </a:rPr>
-              <a:t>✓ Size: Medium (1,677-2,260 sqft)</a:t>
+              <a:t>✓ Size: Medium (1,740-2,550 sqft)</a:t>
             </a:r>
             <a:endParaRPr lang="en-US" sz="1100" dirty="0"/>
           </a:p>
@@ -12772,7 +12772,7 @@
                 <a:ea typeface="Calibri" pitchFamily="34" charset="-122"/>
                 <a:cs typeface="Calibri" pitchFamily="34" charset="-120"/>
               </a:rPr>
-              <a:t>Zipcode</a:t>
+              <a:t>Zipcodes</a:t>
             </a:r>
             <a:endParaRPr lang="en-US" sz="1100" dirty="0"/>
           </a:p>
@@ -12811,7 +12811,7 @@
                 <a:ea typeface="Calibri" pitchFamily="34" charset="-122"/>
                 <a:cs typeface="Calibri" pitchFamily="34" charset="-120"/>
               </a:rPr>
-              <a:t>✓ 98023</a:t>
+              <a:t>✓ 98014 / 98045</a:t>
             </a:r>
             <a:endParaRPr lang="en-US" sz="1100" dirty="0"/>
           </a:p>
@@ -13025,16 +13025,51 @@
           </a:p>
         </p:txBody>
       </p:sp>
+      <p:sp>
+        <p:nvSpPr>
+          <p:cNvPr id="6" name="TextBox 5"/>
+          <p:cNvSpPr txBox="1"/>
+          <p:nvPr/>
+        </p:nvSpPr>
+        <p:spPr>
+          <a:xfrm>
+            <a:off x="457200" y="4980000"/>
+            <a:ext cx="8229600" cy="160000"/>
+          </a:xfrm>
+          <a:prstGeom prst="rect">
+            <a:avLst/>
+          </a:prstGeom>
+          <a:noFill/>
+        </p:spPr>
+        <p:txBody>
+          <a:bodyPr wrap="square">
+            <a:spAutoFit/>
+          </a:bodyPr>
+          <a:lstStyle/>
+          <a:p>
+            <a:pPr algn="ctr"/>
+            <a:r>
+              <a:rPr sz="1000" b="0">
+                <a:solidFill>
+                  <a:srgbClr val="4A4A4A"/>
+                </a:solidFill>
+                <a:latin typeface="Calibri"/>
+              </a:rPr>
+              <a:t>Effect direction is mixed across Small / Medium / Large rural homes</a:t>
+            </a:r>
+          </a:p>
+        </p:txBody>
+      </p:sp>
       <p:pic>
         <p:nvPicPr>
-          <p:cNvPr id="5" name="Picture 4" descr="H1_plot_price_by_renovation_status.png"/>
+          <p:cNvPr id="7" name="Picture 6" descr="H1_plot_price_by_renovation_status.png"/>
           <p:cNvPicPr>
             <a:picLocks noChangeAspect="1"/>
           </p:cNvPicPr>
           <p:nvPr/>
         </p:nvPicPr>
         <p:blipFill>
-          <a:blip r:embed="rId2"/>
+          <a:blip r:embed="rId3"/>
           <a:stretch>
             <a:fillRect/>
           </a:stretch>
@@ -13049,41 +13084,6 @@
           </a:prstGeom>
         </p:spPr>
       </p:pic>
-      <p:sp>
-        <p:nvSpPr>
-          <p:cNvPr id="6" name="TextBox 5"/>
-          <p:cNvSpPr txBox="1"/>
-          <p:nvPr/>
-        </p:nvSpPr>
-        <p:spPr>
-          <a:xfrm>
-            <a:off x="457200" y="4980000"/>
-            <a:ext cx="8229600" cy="160000"/>
-          </a:xfrm>
-          <a:prstGeom prst="rect">
-            <a:avLst/>
-          </a:prstGeom>
-          <a:noFill/>
-        </p:spPr>
-        <p:txBody>
-          <a:bodyPr wrap="square">
-            <a:spAutoFit/>
-          </a:bodyPr>
-          <a:lstStyle/>
-          <a:p>
-            <a:pPr algn="ctr"/>
-            <a:r>
-              <a:rPr sz="1000" b="0">
-                <a:solidFill>
-                  <a:srgbClr val="4A4A4A"/>
-                </a:solidFill>
-                <a:latin typeface="Calibri"/>
-              </a:rPr>
-              <a:t>Effect direction is mixed across Small / Medium / Large rural homes</a:t>
-            </a:r>
-          </a:p>
-        </p:txBody>
-      </p:sp>
     </p:spTree>
   </p:cSld>
   <p:clrMapOvr>
@@ -13214,16 +13214,51 @@
           </a:p>
         </p:txBody>
       </p:sp>
+      <p:sp>
+        <p:nvSpPr>
+          <p:cNvPr id="6" name="TextBox 5"/>
+          <p:cNvSpPr txBox="1"/>
+          <p:nvPr/>
+        </p:nvSpPr>
+        <p:spPr>
+          <a:xfrm>
+            <a:off x="457200" y="4980000"/>
+            <a:ext cx="8229600" cy="160000"/>
+          </a:xfrm>
+          <a:prstGeom prst="rect">
+            <a:avLst/>
+          </a:prstGeom>
+          <a:noFill/>
+        </p:spPr>
+        <p:txBody>
+          <a:bodyPr wrap="square">
+            <a:spAutoFit/>
+          </a:bodyPr>
+          <a:lstStyle/>
+          <a:p>
+            <a:pPr algn="ctr"/>
+            <a:r>
+              <a:rPr sz="1000" b="0">
+                <a:solidFill>
+                  <a:srgbClr val="4A4A4A"/>
+                </a:solidFill>
+                <a:latin typeface="Calibri"/>
+              </a:rPr>
+              <a:t>Focus view: the size band actually used for William's two candidates</a:t>
+            </a:r>
+          </a:p>
+        </p:txBody>
+      </p:sp>
       <p:pic>
         <p:nvPicPr>
-          <p:cNvPr id="5" name="Picture 4" descr="H1_plot_price_by_renovation_status_medium.png"/>
+          <p:cNvPr id="7" name="Picture 6" descr="H1_plot_price_by_renovation_status_medium.png"/>
           <p:cNvPicPr>
             <a:picLocks noChangeAspect="1"/>
           </p:cNvPicPr>
           <p:nvPr/>
         </p:nvPicPr>
         <p:blipFill>
-          <a:blip r:embed="rId2"/>
+          <a:blip r:embed="rId3"/>
           <a:stretch>
             <a:fillRect/>
           </a:stretch>
@@ -13238,41 +13273,6 @@
           </a:prstGeom>
         </p:spPr>
       </p:pic>
-      <p:sp>
-        <p:nvSpPr>
-          <p:cNvPr id="6" name="TextBox 5"/>
-          <p:cNvSpPr txBox="1"/>
-          <p:nvPr/>
-        </p:nvSpPr>
-        <p:spPr>
-          <a:xfrm>
-            <a:off x="457200" y="4980000"/>
-            <a:ext cx="8229600" cy="160000"/>
-          </a:xfrm>
-          <a:prstGeom prst="rect">
-            <a:avLst/>
-          </a:prstGeom>
-          <a:noFill/>
-        </p:spPr>
-        <p:txBody>
-          <a:bodyPr wrap="square">
-            <a:spAutoFit/>
-          </a:bodyPr>
-          <a:lstStyle/>
-          <a:p>
-            <a:pPr algn="ctr"/>
-            <a:r>
-              <a:rPr sz="1000" b="0">
-                <a:solidFill>
-                  <a:srgbClr val="4A4A4A"/>
-                </a:solidFill>
-                <a:latin typeface="Calibri"/>
-              </a:rPr>
-              <a:t>Focus view: the size band actually used for William's two candidates</a:t>
-            </a:r>
-          </a:p>
-        </p:txBody>
-      </p:sp>
     </p:spTree>
   </p:cSld>
   <p:clrMapOvr>
@@ -13477,7 +13477,7 @@
                 </a:solidFill>
                 <a:latin typeface="Calibri"/>
               </a:rPr>
-              <a:t>House #1 - Zip 98023</a:t>
+              <a:t>House #1 - Zip 98014</a:t>
             </a:r>
           </a:p>
         </p:txBody>
@@ -13547,7 +13547,7 @@
                 </a:solidFill>
                 <a:latin typeface="Calibri"/>
               </a:rPr>
-              <a:t>$182,700</a:t>
+              <a:t>$265,000</a:t>
             </a:r>
           </a:p>
         </p:txBody>
@@ -13617,7 +13617,7 @@
                 </a:solidFill>
                 <a:latin typeface="Calibri"/>
               </a:rPr>
-              <a:t>1,740 sqft</a:t>
+              <a:t>1,850 sqft</a:t>
             </a:r>
           </a:p>
         </p:txBody>
@@ -13687,7 +13687,7 @@
                 </a:solidFill>
                 <a:latin typeface="Calibri"/>
               </a:rPr>
-              <a:t>3 / 2.25</a:t>
+              <a:t>3 / 2.0</a:t>
             </a:r>
           </a:p>
         </p:txBody>
@@ -13757,7 +13757,7 @@
                 </a:solidFill>
                 <a:latin typeface="Calibri"/>
               </a:rPr>
-              <a:t>1978</a:t>
+              <a:t>1992</a:t>
             </a:r>
           </a:p>
         </p:txBody>
@@ -13827,7 +13827,7 @@
                 </a:solidFill>
                 <a:latin typeface="Calibri"/>
               </a:rPr>
-              <a:t>6,650 sqft</a:t>
+              <a:t>16,535 sqft</a:t>
             </a:r>
           </a:p>
         </p:txBody>
@@ -13897,7 +13897,7 @@
                 </a:solidFill>
                 <a:latin typeface="Calibri"/>
               </a:rPr>
-              <a:t>✓ Rural, quiet, no close neighbors</a:t>
+              <a:t>✓ Genuinely rural (RUCA-classified)</a:t>
             </a:r>
           </a:p>
         </p:txBody>
@@ -14046,7 +14046,7 @@
                 </a:solidFill>
                 <a:latin typeface="Calibri"/>
               </a:rPr>
-              <a:t>House #2 - Zip 98023</a:t>
+              <a:t>House #2 - Zip 98045</a:t>
             </a:r>
           </a:p>
         </p:txBody>
@@ -14116,7 +14116,7 @@
                 </a:solidFill>
                 <a:latin typeface="Calibri"/>
               </a:rPr>
-              <a:t>$185,000</a:t>
+              <a:t>$271,000</a:t>
             </a:r>
           </a:p>
         </p:txBody>
@@ -14186,7 +14186,7 @@
                 </a:solidFill>
                 <a:latin typeface="Calibri"/>
               </a:rPr>
-              <a:t>1,990 sqft</a:t>
+              <a:t>1,800 sqft</a:t>
             </a:r>
           </a:p>
         </p:txBody>
@@ -14256,7 +14256,7 @@
                 </a:solidFill>
                 <a:latin typeface="Calibri"/>
               </a:rPr>
-              <a:t>5 / 1.75</a:t>
+              <a:t>4 / 1.5</a:t>
             </a:r>
           </a:p>
         </p:txBody>
@@ -14326,7 +14326,7 @@
                 </a:solidFill>
                 <a:latin typeface="Calibri"/>
               </a:rPr>
-              <a:t>1955</a:t>
+              <a:t>1977</a:t>
             </a:r>
           </a:p>
         </p:txBody>
@@ -14396,7 +14396,7 @@
                 </a:solidFill>
                 <a:latin typeface="Calibri"/>
               </a:rPr>
-              <a:t>27,810 sqft</a:t>
+              <a:t>9,576 sqft</a:t>
             </a:r>
           </a:p>
         </p:txBody>
@@ -14466,7 +14466,7 @@
                 </a:solidFill>
                 <a:latin typeface="Calibri"/>
               </a:rPr>
-              <a:t>✓ Much larger lot for the dog</a:t>
+              <a:t>✓ More bedrooms, similar price</a:t>
             </a:r>
           </a:p>
         </p:txBody>
@@ -14501,7 +14501,7 @@
                 </a:solidFill>
                 <a:latin typeface="Calibri"/>
               </a:rPr>
-              <a:t>✓ More bedrooms, similar price</a:t>
+              <a:t>✓ Genuinely rural (RUCA-classified)</a:t>
             </a:r>
           </a:p>
         </p:txBody>

--- a/work_and_report/presentations/William_Rodriguez_Offers_NeueFische_Style_2.pptx
+++ b/work_and_report/presentations/William_Rodriguez_Offers_NeueFische_Style_2.pptx
@@ -11293,7 +11293,7 @@
                 <a:ea typeface="Calibri" pitchFamily="34" charset="-122"/>
                 <a:cs typeface="Calibri" pitchFamily="34" charset="-120"/>
               </a:rPr>
-              <a:t>• Rural = RUCA-classified (849 houses, 49 zips)</a:t>
+              <a:t>• Rural = RUCA-classified (849 houses)</a:t>
             </a:r>
             <a:endParaRPr lang="en-US" sz="1100" dirty="0"/>
           </a:p>

--- a/work_and_report/presentations/William_Rodriguez_Offers_NeueFische_Style_2.pptx
+++ b/work_and_report/presentations/William_Rodriguez_Offers_NeueFische_Style_2.pptx
@@ -9161,7 +9161,7 @@
                 <a:ea typeface="Calibri" pitchFamily="34" charset="-122"/>
                 <a:cs typeface="Calibri" pitchFamily="34" charset="-120"/>
               </a:rPr>
-              <a:t>• $265K - $271K range</a:t>
+              <a:t>• $182.7K - $185K range</a:t>
             </a:r>
             <a:endParaRPr lang="en-US" sz="1000" dirty="0"/>
           </a:p>
@@ -11293,7 +11293,7 @@
                 <a:ea typeface="Calibri" pitchFamily="34" charset="-122"/>
                 <a:cs typeface="Calibri" pitchFamily="34" charset="-120"/>
               </a:rPr>
-              <a:t>• Rural = RUCA-classified (849 houses)</a:t>
+              <a:t>• Rural houses only (3 zip codes)</a:t>
             </a:r>
             <a:endParaRPr lang="en-US" sz="1100" dirty="0"/>
           </a:p>
@@ -11332,7 +11332,7 @@
                 <a:ea typeface="Calibri" pitchFamily="34" charset="-122"/>
                 <a:cs typeface="Calibri" pitchFamily="34" charset="-120"/>
               </a:rPr>
-              <a:t>• Effect direction inconsistent by size</a:t>
+              <a:t>• Effect direction varies by size</a:t>
             </a:r>
             <a:endParaRPr lang="en-US" sz="1100" dirty="0"/>
           </a:p>
@@ -11371,7 +11371,7 @@
                 <a:ea typeface="Calibri" pitchFamily="34" charset="-122"/>
                 <a:cs typeface="Calibri" pitchFamily="34" charset="-120"/>
               </a:rPr>
-              <a:t>• Medium homes: $1.55K cheaper (non-reno)</a:t>
+              <a:t>• Medium homes: $8K cheaper (non-reno)</a:t>
             </a:r>
             <a:endParaRPr lang="en-US" sz="1100" dirty="0"/>
           </a:p>
@@ -11410,7 +11410,7 @@
                 <a:ea typeface="Calibri" pitchFamily="34" charset="-122"/>
                 <a:cs typeface="Calibri" pitchFamily="34" charset="-120"/>
               </a:rPr>
-              <a:t>• Large homes: $12.5K pricier (non-reno)</a:t>
+              <a:t>• Large homes: $21.75K cheaper (non-reno)</a:t>
             </a:r>
             <a:endParaRPr lang="en-US" sz="1100" dirty="0"/>
           </a:p>
@@ -11449,7 +11449,7 @@
                 <a:ea typeface="Calibri" pitchFamily="34" charset="-122"/>
                 <a:cs typeface="Calibri" pitchFamily="34" charset="-120"/>
               </a:rPr>
-              <a:t>• Small homes: $5.8K pricier (non-reno)</a:t>
+              <a:t>• Small homes: $2.5K pricier (non-reno)</a:t>
             </a:r>
             <a:endParaRPr lang="en-US" sz="1100" dirty="0"/>
           </a:p>
@@ -11673,7 +11673,7 @@
                 <a:ea typeface="Calibri" pitchFamily="34" charset="-122"/>
                 <a:cs typeface="Calibri" pitchFamily="34" charset="-120"/>
               </a:rPr>
-              <a:t>279 houses</a:t>
+              <a:t>539 houses</a:t>
             </a:r>
             <a:endParaRPr lang="en-US" sz="1100" dirty="0"/>
           </a:p>
@@ -11751,7 +11751,7 @@
                 <a:ea typeface="Calibri" pitchFamily="34" charset="-122"/>
                 <a:cs typeface="Calibri" pitchFamily="34" charset="-120"/>
               </a:rPr>
-              <a:t>0.752</a:t>
+              <a:t>0.377</a:t>
             </a:r>
             <a:endParaRPr lang="en-US" sz="1100" dirty="0"/>
           </a:p>
@@ -11907,7 +11907,7 @@
                 <a:ea typeface="Calibri" pitchFamily="34" charset="-122"/>
                 <a:cs typeface="Calibri" pitchFamily="34" charset="-120"/>
               </a:rPr>
-              <a:t>$1,550</a:t>
+              <a:t>$8,000</a:t>
             </a:r>
             <a:endParaRPr lang="en-US" sz="1100" dirty="0"/>
           </a:p>
@@ -11946,7 +11946,7 @@
                 <a:ea typeface="Calibri" pitchFamily="34" charset="-122"/>
                 <a:cs typeface="Calibri" pitchFamily="34" charset="-120"/>
               </a:rPr>
-              <a:t>Rural Def.</a:t>
+              <a:t>Rural Zips</a:t>
             </a:r>
             <a:endParaRPr lang="en-US" sz="1100" dirty="0"/>
           </a:p>
@@ -11985,7 +11985,7 @@
                 <a:ea typeface="Calibri" pitchFamily="34" charset="-122"/>
                 <a:cs typeface="Calibri" pitchFamily="34" charset="-120"/>
               </a:rPr>
-              <a:t>RUCA codes</a:t>
+              <a:t>98038/42/23</a:t>
             </a:r>
             <a:endParaRPr lang="en-US" sz="1100" dirty="0"/>
           </a:p>
@@ -12275,7 +12275,7 @@
                 <a:ea typeface="Calibri" pitchFamily="34" charset="-122"/>
                 <a:cs typeface="Calibri" pitchFamily="34" charset="-120"/>
               </a:rPr>
-              <a:t>✓ Size: Medium (1,740-2,550 sqft)</a:t>
+              <a:t>✓ Size: Medium (1,677-2,260 sqft)</a:t>
             </a:r>
             <a:endParaRPr lang="en-US" sz="1100" dirty="0"/>
           </a:p>
@@ -12772,7 +12772,7 @@
                 <a:ea typeface="Calibri" pitchFamily="34" charset="-122"/>
                 <a:cs typeface="Calibri" pitchFamily="34" charset="-120"/>
               </a:rPr>
-              <a:t>Zipcodes</a:t>
+              <a:t>Zipcode</a:t>
             </a:r>
             <a:endParaRPr lang="en-US" sz="1100" dirty="0"/>
           </a:p>
@@ -12811,7 +12811,7 @@
                 <a:ea typeface="Calibri" pitchFamily="34" charset="-122"/>
                 <a:cs typeface="Calibri" pitchFamily="34" charset="-120"/>
               </a:rPr>
-              <a:t>✓ 98014 / 98045</a:t>
+              <a:t>✓ 98023</a:t>
             </a:r>
             <a:endParaRPr lang="en-US" sz="1100" dirty="0"/>
           </a:p>
@@ -13062,14 +13062,14 @@
       </p:sp>
       <p:pic>
         <p:nvPicPr>
-          <p:cNvPr id="7" name="Picture 6" descr="H1_plot_price_by_renovation_status.png"/>
+          <p:cNvPr id="7" name="Picture 6" descr="image.png"/>
           <p:cNvPicPr>
             <a:picLocks noChangeAspect="1"/>
           </p:cNvPicPr>
           <p:nvPr/>
         </p:nvPicPr>
         <p:blipFill>
-          <a:blip r:embed="rId3"/>
+          <a:blip r:embed="rId2"/>
           <a:stretch>
             <a:fillRect/>
           </a:stretch>
@@ -13251,14 +13251,14 @@
       </p:sp>
       <p:pic>
         <p:nvPicPr>
-          <p:cNvPr id="7" name="Picture 6" descr="H1_plot_price_by_renovation_status_medium.png"/>
+          <p:cNvPr id="7" name="Picture 6" descr="image.png"/>
           <p:cNvPicPr>
             <a:picLocks noChangeAspect="1"/>
           </p:cNvPicPr>
           <p:nvPr/>
         </p:nvPicPr>
         <p:blipFill>
-          <a:blip r:embed="rId3"/>
+          <a:blip r:embed="rId2"/>
           <a:stretch>
             <a:fillRect/>
           </a:stretch>
@@ -13477,7 +13477,7 @@
                 </a:solidFill>
                 <a:latin typeface="Calibri"/>
               </a:rPr>
-              <a:t>House #1 - Zip 98014</a:t>
+              <a:t>House #1 - Zip 98023</a:t>
             </a:r>
           </a:p>
         </p:txBody>
@@ -13547,7 +13547,7 @@
                 </a:solidFill>
                 <a:latin typeface="Calibri"/>
               </a:rPr>
-              <a:t>$265,000</a:t>
+              <a:t>$182,700</a:t>
             </a:r>
           </a:p>
         </p:txBody>
@@ -13617,7 +13617,7 @@
                 </a:solidFill>
                 <a:latin typeface="Calibri"/>
               </a:rPr>
-              <a:t>1,850 sqft</a:t>
+              <a:t>1,740 sqft</a:t>
             </a:r>
           </a:p>
         </p:txBody>
@@ -13687,7 +13687,7 @@
                 </a:solidFill>
                 <a:latin typeface="Calibri"/>
               </a:rPr>
-              <a:t>3 / 2.0</a:t>
+              <a:t>3 / 2.25</a:t>
             </a:r>
           </a:p>
         </p:txBody>
@@ -13757,7 +13757,7 @@
                 </a:solidFill>
                 <a:latin typeface="Calibri"/>
               </a:rPr>
-              <a:t>1992</a:t>
+              <a:t>1978</a:t>
             </a:r>
           </a:p>
         </p:txBody>
@@ -13827,7 +13827,7 @@
                 </a:solidFill>
                 <a:latin typeface="Calibri"/>
               </a:rPr>
-              <a:t>16,535 sqft</a:t>
+              <a:t>6,650 sqft</a:t>
             </a:r>
           </a:p>
         </p:txBody>
@@ -13897,7 +13897,7 @@
                 </a:solidFill>
                 <a:latin typeface="Calibri"/>
               </a:rPr>
-              <a:t>✓ Genuinely rural (RUCA-classified)</a:t>
+              <a:t>✓ Rural, quiet, no close neighbors</a:t>
             </a:r>
           </a:p>
         </p:txBody>
@@ -14046,7 +14046,7 @@
                 </a:solidFill>
                 <a:latin typeface="Calibri"/>
               </a:rPr>
-              <a:t>House #2 - Zip 98045</a:t>
+              <a:t>House #2 - Zip 98023</a:t>
             </a:r>
           </a:p>
         </p:txBody>
@@ -14116,7 +14116,7 @@
                 </a:solidFill>
                 <a:latin typeface="Calibri"/>
               </a:rPr>
-              <a:t>$271,000</a:t>
+              <a:t>$185,000</a:t>
             </a:r>
           </a:p>
         </p:txBody>
@@ -14186,7 +14186,7 @@
                 </a:solidFill>
                 <a:latin typeface="Calibri"/>
               </a:rPr>
-              <a:t>1,800 sqft</a:t>
+              <a:t>1,990 sqft</a:t>
             </a:r>
           </a:p>
         </p:txBody>
@@ -14256,7 +14256,7 @@
                 </a:solidFill>
                 <a:latin typeface="Calibri"/>
               </a:rPr>
-              <a:t>4 / 1.5</a:t>
+              <a:t>5 / 1.75</a:t>
             </a:r>
           </a:p>
         </p:txBody>
@@ -14326,7 +14326,7 @@
                 </a:solidFill>
                 <a:latin typeface="Calibri"/>
               </a:rPr>
-              <a:t>1977</a:t>
+              <a:t>1955</a:t>
             </a:r>
           </a:p>
         </p:txBody>
@@ -14396,7 +14396,7 @@
                 </a:solidFill>
                 <a:latin typeface="Calibri"/>
               </a:rPr>
-              <a:t>9,576 sqft</a:t>
+              <a:t>27,810 sqft</a:t>
             </a:r>
           </a:p>
         </p:txBody>
@@ -14466,7 +14466,7 @@
                 </a:solidFill>
                 <a:latin typeface="Calibri"/>
               </a:rPr>
-              <a:t>✓ More bedrooms, similar price</a:t>
+              <a:t>✓ Much larger lot for the dog</a:t>
             </a:r>
           </a:p>
         </p:txBody>
@@ -14501,7 +14501,7 @@
                 </a:solidFill>
                 <a:latin typeface="Calibri"/>
               </a:rPr>
-              <a:t>✓ Genuinely rural (RUCA-classified)</a:t>
+              <a:t>✓ More bedrooms, similar price</a:t>
             </a:r>
           </a:p>
         </p:txBody>

--- a/work_and_report/presentations/William_Rodriguez_Offers_NeueFische_Style_2.pptx
+++ b/work_and_report/presentations/William_Rodriguez_Offers_NeueFische_Style_2.pptx
@@ -14,6 +14,7 @@
     <p:sldId id="269" r:id="rId20"/>
     <p:sldId id="270" r:id="rId21"/>
     <p:sldId id="268" r:id="rId19"/>
+    <p:sldId id="278" r:id="rId29"/>
     <p:sldId id="262" r:id="rId8"/>
     <p:sldId id="263" r:id="rId9"/>
     <p:sldId id="264" r:id="rId10"/>
@@ -9637,6 +9638,287 @@
 </p:sld>
 </file>
 
+<file path=ppt/slides/slide23.xml><?xml version="1.0" encoding="utf-8"?>
+<p:sld xmlns:a="http://schemas.openxmlformats.org/drawingml/2006/main" xmlns:p="http://schemas.openxmlformats.org/presentationml/2006/main" xmlns:r="http://schemas.openxmlformats.org/officeDocument/2006/relationships">
+  <p:cSld>
+    <p:spTree>
+      <p:nvGrpSpPr>
+        <p:cNvPr id="1" name=""/>
+        <p:cNvGrpSpPr/>
+        <p:nvPr/>
+      </p:nvGrpSpPr>
+      <p:grpSpPr/>
+      <p:sp>
+        <p:nvSpPr>
+          <p:cNvPr id="2" name="TextBox 1"/>
+          <p:cNvSpPr txBox="1"/>
+          <p:nvPr/>
+        </p:nvSpPr>
+        <p:spPr>
+          <a:xfrm>
+            <a:off x="457200" y="274320"/>
+            <a:ext cx="8229600" cy="457200"/>
+          </a:xfrm>
+          <a:prstGeom prst="rect">
+            <a:avLst/>
+          </a:prstGeom>
+          <a:noFill/>
+        </p:spPr>
+        <p:txBody>
+          <a:bodyPr wrap="none">
+            <a:spAutoFit/>
+          </a:bodyPr>
+          <a:lstStyle/>
+          <a:p>
+            <a:r>
+              <a:rPr sz="1400" b="1">
+                <a:solidFill>
+                  <a:srgbClr val="FF6B54"/>
+                </a:solidFill>
+                <a:latin typeface="Calibri"/>
+              </a:rPr>
+              <a:t>H1 Methodology Note</a:t>
+            </a:r>
+          </a:p>
+        </p:txBody>
+      </p:sp>
+      <p:sp>
+        <p:nvSpPr>
+          <p:cNvPr id="3" name="TextBox 2"/>
+          <p:cNvSpPr txBox="1"/>
+          <p:nvPr/>
+        </p:nvSpPr>
+        <p:spPr>
+          <a:xfrm>
+            <a:off x="457200" y="731520"/>
+            <a:ext cx="8229600" cy="365760"/>
+          </a:xfrm>
+          <a:prstGeom prst="rect">
+            <a:avLst/>
+          </a:prstGeom>
+          <a:noFill/>
+        </p:spPr>
+        <p:txBody>
+          <a:bodyPr wrap="none">
+            <a:spAutoFit/>
+          </a:bodyPr>
+          <a:lstStyle/>
+          <a:p>
+            <a:r>
+              <a:rPr sz="2800" b="1">
+                <a:solidFill>
+                  <a:srgbClr val="1E3A5F"/>
+                </a:solidFill>
+                <a:latin typeface="Calibri"/>
+              </a:rPr>
+              <a:t>Zip Code Alone Can't Identify Rural vs Urban</a:t>
+            </a:r>
+          </a:p>
+        </p:txBody>
+      </p:sp>
+      <p:sp>
+        <p:nvSpPr>
+          <p:cNvPr id="4" name="Rectangle 3"/>
+          <p:cNvSpPr/>
+          <p:nvPr/>
+        </p:nvSpPr>
+        <p:spPr>
+          <a:xfrm>
+            <a:off x="0" y="1188720"/>
+            <a:ext cx="9144000" cy="137160"/>
+          </a:xfrm>
+          <a:prstGeom prst="rect">
+            <a:avLst/>
+          </a:prstGeom>
+          <a:solidFill>
+            <a:srgbClr val="FF6B54"/>
+          </a:solidFill>
+          <a:ln>
+            <a:noFill/>
+          </a:ln>
+          <a:effectLst/>
+        </p:spPr>
+        <p:style>
+          <a:lnRef idx="1">
+            <a:schemeClr val="accent1"/>
+          </a:lnRef>
+          <a:fillRef idx="3">
+            <a:schemeClr val="accent1"/>
+          </a:fillRef>
+          <a:effectRef idx="2">
+            <a:schemeClr val="accent1"/>
+          </a:effectRef>
+          <a:fontRef idx="minor">
+            <a:schemeClr val="lt1"/>
+          </a:fontRef>
+        </p:style>
+        <p:txBody>
+          <a:bodyPr rtlCol="0" anchor="ctr"/>
+          <a:lstStyle/>
+          <a:p>
+            <a:pPr algn="ctr"/>
+          </a:p>
+        </p:txBody>
+      </p:sp>
+      <p:sp>
+        <p:nvSpPr>
+          <p:cNvPr id="5" name="TextBox 4"/>
+          <p:cNvSpPr txBox="1"/>
+          <p:nvPr/>
+        </p:nvSpPr>
+        <p:spPr>
+          <a:xfrm>
+            <a:off x="457200" y="1500000"/>
+            <a:ext cx="8229600" cy="3300000"/>
+          </a:xfrm>
+          <a:prstGeom prst="rect">
+            <a:avLst/>
+          </a:prstGeom>
+          <a:noFill/>
+        </p:spPr>
+        <p:txBody>
+          <a:bodyPr wrap="square">
+            <a:spAutoFit/>
+          </a:bodyPr>
+          <a:lstStyle/>
+          <a:p>
+            <a:pPr>
+              <a:spcAft>
+                <a:spcPts val="1400"/>
+              </a:spcAft>
+            </a:pPr>
+            <a:r>
+              <a:rPr sz="1400">
+                <a:solidFill>
+                  <a:srgbClr val="4A4A4A"/>
+                </a:solidFill>
+                <a:latin typeface="Calibri"/>
+              </a:rPr>
+              <a:t>• We tried to identify Rural zip codes using only patterns already in the housing data: lot size, distance from downtown, and sales per zip.</a:t>
+            </a:r>
+          </a:p>
+          <a:p>
+            <a:pPr>
+              <a:spcAft>
+                <a:spcPts val="1400"/>
+              </a:spcAft>
+            </a:pPr>
+            <a:r>
+              <a:rPr sz="1400">
+                <a:solidFill>
+                  <a:srgbClr val="4A4A4A"/>
+                </a:solidFill>
+                <a:latin typeface="Calibri"/>
+              </a:rPr>
+              <a:t>• The idea: large lots, long distances, and few sales should signal “Rural.”</a:t>
+            </a:r>
+          </a:p>
+          <a:p>
+            <a:pPr>
+              <a:spcAft>
+                <a:spcPts val="1400"/>
+              </a:spcAft>
+            </a:pPr>
+            <a:r>
+              <a:rPr sz="1400">
+                <a:solidFill>
+                  <a:srgbClr val="4A4A4A"/>
+                </a:solidFill>
+                <a:latin typeface="Calibri"/>
+              </a:rPr>
+              <a:t>• We tested the best possible threshold for each signal against the official RUCA rural/urban classification.</a:t>
+            </a:r>
+          </a:p>
+          <a:p>
+            <a:pPr>
+              <a:spcAft>
+                <a:spcPts val="1400"/>
+              </a:spcAft>
+            </a:pPr>
+            <a:r>
+              <a:rPr sz="1400">
+                <a:solidFill>
+                  <a:srgbClr val="4A4A4A"/>
+                </a:solidFill>
+                <a:latin typeface="Calibri"/>
+              </a:rPr>
+              <a:t>• Even the best rule missed 3 of the 5 real Rural zip codes.</a:t>
+            </a:r>
+          </a:p>
+          <a:p>
+            <a:pPr>
+              <a:spcAft>
+                <a:spcPts val="1400"/>
+              </a:spcAft>
+            </a:pPr>
+            <a:r>
+              <a:rPr sz="1400">
+                <a:solidFill>
+                  <a:srgbClr val="4A4A4A"/>
+                </a:solidFill>
+                <a:latin typeface="Calibri"/>
+              </a:rPr>
+              <a:t>• Some zip codes with huge average lots (over 38,000 sqft) are actually Urban.</a:t>
+            </a:r>
+          </a:p>
+          <a:p>
+            <a:pPr>
+              <a:spcAft>
+                <a:spcPts val="1400"/>
+              </a:spcAft>
+            </a:pPr>
+            <a:r>
+              <a:rPr sz="1400">
+                <a:solidFill>
+                  <a:srgbClr val="4A4A4A"/>
+                </a:solidFill>
+                <a:latin typeface="Calibri"/>
+              </a:rPr>
+              <a:t>• Some zip codes with small average lots are actually Rural.</a:t>
+            </a:r>
+          </a:p>
+          <a:p>
+            <a:pPr>
+              <a:spcAft>
+                <a:spcPts val="1400"/>
+              </a:spcAft>
+            </a:pPr>
+            <a:r>
+              <a:rPr sz="1400">
+                <a:solidFill>
+                  <a:srgbClr val="4A4A4A"/>
+                </a:solidFill>
+                <a:latin typeface="Calibri"/>
+              </a:rPr>
+              <a:t>• High accuracy scores were misleading — guessing “Urban” every time already scores over 90%.</a:t>
+            </a:r>
+          </a:p>
+          <a:p>
+            <a:pPr>
+              <a:spcAft>
+                <a:spcPts val="1400"/>
+              </a:spcAft>
+            </a:pPr>
+            <a:r>
+              <a:rPr sz="1400">
+                <a:solidFill>
+                  <a:srgbClr val="4A4A4A"/>
+                </a:solidFill>
+                <a:latin typeface="Calibri"/>
+              </a:rPr>
+              <a:t>• Conclusion: zip code alone cannot reliably separate Rural from Urban in this dataset.</a:t>
+            </a:r>
+          </a:p>
+        </p:txBody>
+      </p:sp>
+    </p:spTree>
+  </p:cSld>
+  <p:clrMapOvr>
+    <a:masterClrMapping/>
+  </p:clrMapOvr>
+</p:sld>
+</file>
+
 <file path=ppt/slides/slide3.xml><?xml version="1.0" encoding="utf-8"?>
 <p:sld xmlns:a="http://schemas.openxmlformats.org/drawingml/2006/main" xmlns:r="http://schemas.openxmlformats.org/officeDocument/2006/relationships" xmlns:p="http://schemas.openxmlformats.org/presentationml/2006/main">
   <p:cSld name="Slide 3">
